--- a/presentation/0709_세미나_발표자료_초안.pptx
+++ b/presentation/0709_세미나_발표자료_초안.pptx
@@ -7452,6 +7452,26 @@
                 <a:spcPct val="125000"/>
               </a:lnSpc>
               <a:spcAft>
+                <a:spcPts val="600"/>
+              </a:spcAft>
+            </a:pPr>
+            <a:r>
+              <a:rPr sz="1600" b="0">
+                <a:solidFill>
+                  <a:srgbClr val="5A5A5A"/>
+                </a:solidFill>
+                <a:latin typeface="맑은 고딕"/>
+                <a:ea typeface="맑은 고딕"/>
+              </a:rPr>
+              <a:t>     –  MLWE·D-MLWE·MSIS의 구체적 정의는 이후 강의에서 순차 등장: SIS(2강) · LWE(3강) · 격자(4강) · Module-SIS/Module-LWE(7강)</a:t>
+            </a:r>
+          </a:p>
+          <a:p>
+            <a:pPr>
+              <a:lnSpc>
+                <a:spcPct val="125000"/>
+              </a:lnSpc>
+              <a:spcAft>
                 <a:spcPts val="1400"/>
               </a:spcAft>
             </a:pPr>
@@ -8058,7 +8078,7 @@
         <p:spPr>
           <a:xfrm>
             <a:off x="2223363" y="1783080"/>
-            <a:ext cx="1417320" cy="1051560"/>
+            <a:ext cx="2999232" cy="1051560"/>
           </a:xfrm>
           <a:prstGeom prst="roundRect">
             <a:avLst/>
@@ -8100,99 +8120,7 @@
                 <a:latin typeface="맑은 고딕"/>
                 <a:ea typeface="맑은 고딕"/>
               </a:rPr>
-              <a:t>2. SIS</a:t>
-            </a:r>
-          </a:p>
-        </p:txBody>
-      </p:sp>
-      <p:sp>
-        <p:nvSpPr>
-          <p:cNvPr id="8" name="TextBox 7"/>
-          <p:cNvSpPr txBox="1"/>
-          <p:nvPr/>
-        </p:nvSpPr>
-        <p:spPr>
-          <a:xfrm>
-            <a:off x="3640683" y="1783080"/>
-            <a:ext cx="164592" cy="1051560"/>
-          </a:xfrm>
-          <a:prstGeom prst="rect">
-            <a:avLst/>
-          </a:prstGeom>
-          <a:noFill/>
-        </p:spPr>
-        <p:txBody>
-          <a:bodyPr wrap="none" anchor="ctr">
-            <a:spAutoFit/>
-          </a:bodyPr>
-          <a:lstStyle/>
-          <a:p>
-            <a:pPr algn="ctr"/>
-            <a:r>
-              <a:rPr sz="1600" b="1">
-                <a:solidFill>
-                  <a:srgbClr val="3B6EA5"/>
-                </a:solidFill>
-                <a:latin typeface="맑은 고딕"/>
-                <a:ea typeface="맑은 고딕"/>
-              </a:rPr>
-              <a:t>›</a:t>
-            </a:r>
-          </a:p>
-        </p:txBody>
-      </p:sp>
-      <p:sp>
-        <p:nvSpPr>
-          <p:cNvPr id="9" name="Rounded Rectangle 8"/>
-          <p:cNvSpPr/>
-          <p:nvPr/>
-        </p:nvSpPr>
-        <p:spPr>
-          <a:xfrm>
-            <a:off x="3805275" y="1783080"/>
-            <a:ext cx="1417320" cy="1051560"/>
-          </a:xfrm>
-          <a:prstGeom prst="roundRect">
-            <a:avLst/>
-          </a:prstGeom>
-          <a:solidFill>
-            <a:srgbClr val="E8F0F7"/>
-          </a:solidFill>
-          <a:ln w="12700">
-            <a:solidFill>
-              <a:srgbClr val="3B6EA5"/>
-            </a:solidFill>
-          </a:ln>
-          <a:effectLst/>
-        </p:spPr>
-        <p:style>
-          <a:lnRef idx="1">
-            <a:schemeClr val="accent1"/>
-          </a:lnRef>
-          <a:fillRef idx="3">
-            <a:schemeClr val="accent1"/>
-          </a:fillRef>
-          <a:effectRef idx="2">
-            <a:schemeClr val="accent1"/>
-          </a:effectRef>
-          <a:fontRef idx="minor">
-            <a:schemeClr val="lt1"/>
-          </a:fontRef>
-        </p:style>
-        <p:txBody>
-          <a:bodyPr rtlCol="0" anchor="ctr" wrap="square"/>
-          <a:lstStyle/>
-          <a:p>
-            <a:pPr algn="ctr"/>
-            <a:r>
-              <a:rPr sz="1200" b="1">
-                <a:solidFill>
-                  <a:srgbClr val="1B2A4A"/>
-                </a:solidFill>
-                <a:latin typeface="맑은 고딕"/>
-                <a:ea typeface="맑은 고딕"/>
-              </a:rPr>
-              <a:t>3. LWE</a:t>
+              <a:t>2. SIS  ·  3. LWE</a:t>
             </a:r>
           </a:p>
         </p:txBody>

--- a/presentation/0709_세미나_발표자료_초안.pptx
+++ b/presentation/0709_세미나_발표자료_초안.pptx
@@ -5,18 +5,18 @@
     <p:sldMasterId id="2147483648" r:id="rId1"/>
   </p:sldMasterIdLst>
   <p:sldIdLst>
-    <p:sldId id="256" r:id="rId7"/>
-    <p:sldId id="257" r:id="rId8"/>
-    <p:sldId id="258" r:id="rId9"/>
-    <p:sldId id="259" r:id="rId10"/>
-    <p:sldId id="260" r:id="rId11"/>
-    <p:sldId id="261" r:id="rId12"/>
-    <p:sldId id="262" r:id="rId13"/>
-    <p:sldId id="263" r:id="rId14"/>
-    <p:sldId id="264" r:id="rId15"/>
-    <p:sldId id="265" r:id="rId16"/>
+    <p:sldId id="256" r:id="rId2"/>
+    <p:sldId id="257" r:id="rId3"/>
+    <p:sldId id="258" r:id="rId4"/>
+    <p:sldId id="259" r:id="rId5"/>
+    <p:sldId id="260" r:id="rId6"/>
+    <p:sldId id="261" r:id="rId7"/>
+    <p:sldId id="262" r:id="rId8"/>
+    <p:sldId id="263" r:id="rId9"/>
+    <p:sldId id="264" r:id="rId10"/>
+    <p:sldId id="265" r:id="rId11"/>
   </p:sldIdLst>
-  <p:sldSz cx="12191695" cy="6858000" type="screen4x3"/>
+  <p:sldSz cx="12192000" cy="6858000"/>
   <p:notesSz cx="6858000" cy="9144000"/>
   <p:defaultTextStyle>
     <a:defPPr>
@@ -113,6 +113,22 @@
       </a:defRPr>
     </a:lvl9pPr>
   </p:defaultTextStyle>
+  <p:extLst>
+    <p:ext uri="{EFAFB233-063F-42B5-8137-9DF3F51BA10A}">
+      <p15:sldGuideLst xmlns:p15="http://schemas.microsoft.com/office/powerpoint/2012/main">
+        <p15:guide id="1" orient="horz" pos="2160">
+          <p15:clr>
+            <a:srgbClr val="A4A3A4"/>
+          </p15:clr>
+        </p15:guide>
+        <p15:guide id="2" pos="2880">
+          <p15:clr>
+            <a:srgbClr val="A4A3A4"/>
+          </p15:clr>
+        </p15:guide>
+      </p15:sldGuideLst>
+    </p:ext>
+  </p:extLst>
 </p:presentation>
 </file>
 
@@ -154,10 +170,9 @@
           <a:lstStyle/>
           <a:p>
             <a:r>
-              <a:rPr lang="en-US" smtClean="0"/>
+              <a:rPr lang="en-US"/>
               <a:t>Click to edit Master title style</a:t>
             </a:r>
-            <a:endParaRPr lang="en-US"/>
           </a:p>
         </p:txBody>
       </p:sp>
@@ -273,10 +288,9 @@
           </a:lstStyle>
           <a:p>
             <a:r>
-              <a:rPr lang="en-US" smtClean="0"/>
+              <a:rPr lang="en-US"/>
               <a:t>Click to edit Master subtitle style</a:t>
             </a:r>
-            <a:endParaRPr lang="en-US"/>
           </a:p>
         </p:txBody>
       </p:sp>
@@ -297,7 +311,7 @@
           <a:p>
             <a:fld id="{5BCAD085-E8A6-8845-BD4E-CB4CCA059FC4}" type="datetimeFigureOut">
               <a:rPr lang="en-US" smtClean="0"/>
-              <a:t>1/27/13</a:t>
+              <a:t>7/9/2026</a:t>
             </a:fld>
             <a:endParaRPr lang="en-US"/>
           </a:p>
@@ -391,10 +405,9 @@
           <a:lstStyle/>
           <a:p>
             <a:r>
-              <a:rPr lang="en-US" smtClean="0"/>
+              <a:rPr lang="en-US"/>
               <a:t>Click to edit Master title style</a:t>
             </a:r>
-            <a:endParaRPr lang="en-US"/>
           </a:p>
         </p:txBody>
       </p:sp>
@@ -415,38 +428,37 @@
           <a:p>
             <a:pPr lvl="0"/>
             <a:r>
-              <a:rPr lang="en-US" smtClean="0"/>
+              <a:rPr lang="en-US"/>
               <a:t>Click to edit Master text styles</a:t>
             </a:r>
           </a:p>
           <a:p>
             <a:pPr lvl="1"/>
             <a:r>
-              <a:rPr lang="en-US" smtClean="0"/>
+              <a:rPr lang="en-US"/>
               <a:t>Second level</a:t>
             </a:r>
           </a:p>
           <a:p>
             <a:pPr lvl="2"/>
             <a:r>
-              <a:rPr lang="en-US" smtClean="0"/>
+              <a:rPr lang="en-US"/>
               <a:t>Third level</a:t>
             </a:r>
           </a:p>
           <a:p>
             <a:pPr lvl="3"/>
             <a:r>
-              <a:rPr lang="en-US" smtClean="0"/>
+              <a:rPr lang="en-US"/>
               <a:t>Fourth level</a:t>
             </a:r>
           </a:p>
           <a:p>
             <a:pPr lvl="4"/>
             <a:r>
-              <a:rPr lang="en-US" smtClean="0"/>
+              <a:rPr lang="en-US"/>
               <a:t>Fifth level</a:t>
             </a:r>
-            <a:endParaRPr lang="en-US"/>
           </a:p>
         </p:txBody>
       </p:sp>
@@ -467,7 +479,7 @@
           <a:p>
             <a:fld id="{5BCAD085-E8A6-8845-BD4E-CB4CCA059FC4}" type="datetimeFigureOut">
               <a:rPr lang="en-US" smtClean="0"/>
-              <a:t>1/27/13</a:t>
+              <a:t>7/9/2026</a:t>
             </a:fld>
             <a:endParaRPr lang="en-US"/>
           </a:p>
@@ -566,10 +578,9 @@
           <a:lstStyle/>
           <a:p>
             <a:r>
-              <a:rPr lang="en-US" smtClean="0"/>
+              <a:rPr lang="en-US"/>
               <a:t>Click to edit Master title style</a:t>
             </a:r>
-            <a:endParaRPr lang="en-US"/>
           </a:p>
         </p:txBody>
       </p:sp>
@@ -595,38 +606,37 @@
           <a:p>
             <a:pPr lvl="0"/>
             <a:r>
-              <a:rPr lang="en-US" smtClean="0"/>
+              <a:rPr lang="en-US"/>
               <a:t>Click to edit Master text styles</a:t>
             </a:r>
           </a:p>
           <a:p>
             <a:pPr lvl="1"/>
             <a:r>
-              <a:rPr lang="en-US" smtClean="0"/>
+              <a:rPr lang="en-US"/>
               <a:t>Second level</a:t>
             </a:r>
           </a:p>
           <a:p>
             <a:pPr lvl="2"/>
             <a:r>
-              <a:rPr lang="en-US" smtClean="0"/>
+              <a:rPr lang="en-US"/>
               <a:t>Third level</a:t>
             </a:r>
           </a:p>
           <a:p>
             <a:pPr lvl="3"/>
             <a:r>
-              <a:rPr lang="en-US" smtClean="0"/>
+              <a:rPr lang="en-US"/>
               <a:t>Fourth level</a:t>
             </a:r>
           </a:p>
           <a:p>
             <a:pPr lvl="4"/>
             <a:r>
-              <a:rPr lang="en-US" smtClean="0"/>
+              <a:rPr lang="en-US"/>
               <a:t>Fifth level</a:t>
             </a:r>
-            <a:endParaRPr lang="en-US"/>
           </a:p>
         </p:txBody>
       </p:sp>
@@ -647,7 +657,7 @@
           <a:p>
             <a:fld id="{5BCAD085-E8A6-8845-BD4E-CB4CCA059FC4}" type="datetimeFigureOut">
               <a:rPr lang="en-US" smtClean="0"/>
-              <a:t>1/27/13</a:t>
+              <a:t>7/9/2026</a:t>
             </a:fld>
             <a:endParaRPr lang="en-US"/>
           </a:p>
@@ -741,10 +751,9 @@
           <a:lstStyle/>
           <a:p>
             <a:r>
-              <a:rPr lang="en-US" smtClean="0"/>
+              <a:rPr lang="en-US"/>
               <a:t>Click to edit Master title style</a:t>
             </a:r>
-            <a:endParaRPr lang="en-US"/>
           </a:p>
         </p:txBody>
       </p:sp>
@@ -765,38 +774,37 @@
           <a:p>
             <a:pPr lvl="0"/>
             <a:r>
-              <a:rPr lang="en-US" smtClean="0"/>
+              <a:rPr lang="en-US"/>
               <a:t>Click to edit Master text styles</a:t>
             </a:r>
           </a:p>
           <a:p>
             <a:pPr lvl="1"/>
             <a:r>
-              <a:rPr lang="en-US" smtClean="0"/>
+              <a:rPr lang="en-US"/>
               <a:t>Second level</a:t>
             </a:r>
           </a:p>
           <a:p>
             <a:pPr lvl="2"/>
             <a:r>
-              <a:rPr lang="en-US" smtClean="0"/>
+              <a:rPr lang="en-US"/>
               <a:t>Third level</a:t>
             </a:r>
           </a:p>
           <a:p>
             <a:pPr lvl="3"/>
             <a:r>
-              <a:rPr lang="en-US" smtClean="0"/>
+              <a:rPr lang="en-US"/>
               <a:t>Fourth level</a:t>
             </a:r>
           </a:p>
           <a:p>
             <a:pPr lvl="4"/>
             <a:r>
-              <a:rPr lang="en-US" smtClean="0"/>
+              <a:rPr lang="en-US"/>
               <a:t>Fifth level</a:t>
             </a:r>
-            <a:endParaRPr lang="en-US"/>
           </a:p>
         </p:txBody>
       </p:sp>
@@ -817,7 +825,7 @@
           <a:p>
             <a:fld id="{5BCAD085-E8A6-8845-BD4E-CB4CCA059FC4}" type="datetimeFigureOut">
               <a:rPr lang="en-US" smtClean="0"/>
-              <a:t>1/27/13</a:t>
+              <a:t>7/9/2026</a:t>
             </a:fld>
             <a:endParaRPr lang="en-US"/>
           </a:p>
@@ -920,10 +928,9 @@
           </a:lstStyle>
           <a:p>
             <a:r>
-              <a:rPr lang="en-US" smtClean="0"/>
+              <a:rPr lang="en-US"/>
               <a:t>Click to edit Master title style</a:t>
             </a:r>
-            <a:endParaRPr lang="en-US"/>
           </a:p>
         </p:txBody>
       </p:sp>
@@ -1040,7 +1047,7 @@
           <a:p>
             <a:pPr lvl="0"/>
             <a:r>
-              <a:rPr lang="en-US" smtClean="0"/>
+              <a:rPr lang="en-US"/>
               <a:t>Click to edit Master text styles</a:t>
             </a:r>
           </a:p>
@@ -1063,7 +1070,7 @@
           <a:p>
             <a:fld id="{5BCAD085-E8A6-8845-BD4E-CB4CCA059FC4}" type="datetimeFigureOut">
               <a:rPr lang="en-US" smtClean="0"/>
-              <a:t>1/27/13</a:t>
+              <a:t>7/9/2026</a:t>
             </a:fld>
             <a:endParaRPr lang="en-US"/>
           </a:p>
@@ -1157,10 +1164,9 @@
           <a:lstStyle/>
           <a:p>
             <a:r>
-              <a:rPr lang="en-US" smtClean="0"/>
+              <a:rPr lang="en-US"/>
               <a:t>Click to edit Master title style</a:t>
             </a:r>
-            <a:endParaRPr lang="en-US"/>
           </a:p>
         </p:txBody>
       </p:sp>
@@ -1214,38 +1220,37 @@
           <a:p>
             <a:pPr lvl="0"/>
             <a:r>
-              <a:rPr lang="en-US" smtClean="0"/>
+              <a:rPr lang="en-US"/>
               <a:t>Click to edit Master text styles</a:t>
             </a:r>
           </a:p>
           <a:p>
             <a:pPr lvl="1"/>
             <a:r>
-              <a:rPr lang="en-US" smtClean="0"/>
+              <a:rPr lang="en-US"/>
               <a:t>Second level</a:t>
             </a:r>
           </a:p>
           <a:p>
             <a:pPr lvl="2"/>
             <a:r>
-              <a:rPr lang="en-US" smtClean="0"/>
+              <a:rPr lang="en-US"/>
               <a:t>Third level</a:t>
             </a:r>
           </a:p>
           <a:p>
             <a:pPr lvl="3"/>
             <a:r>
-              <a:rPr lang="en-US" smtClean="0"/>
+              <a:rPr lang="en-US"/>
               <a:t>Fourth level</a:t>
             </a:r>
           </a:p>
           <a:p>
             <a:pPr lvl="4"/>
             <a:r>
-              <a:rPr lang="en-US" smtClean="0"/>
+              <a:rPr lang="en-US"/>
               <a:t>Fifth level</a:t>
             </a:r>
-            <a:endParaRPr lang="en-US"/>
           </a:p>
         </p:txBody>
       </p:sp>
@@ -1299,38 +1304,37 @@
           <a:p>
             <a:pPr lvl="0"/>
             <a:r>
-              <a:rPr lang="en-US" smtClean="0"/>
+              <a:rPr lang="en-US"/>
               <a:t>Click to edit Master text styles</a:t>
             </a:r>
           </a:p>
           <a:p>
             <a:pPr lvl="1"/>
             <a:r>
-              <a:rPr lang="en-US" smtClean="0"/>
+              <a:rPr lang="en-US"/>
               <a:t>Second level</a:t>
             </a:r>
           </a:p>
           <a:p>
             <a:pPr lvl="2"/>
             <a:r>
-              <a:rPr lang="en-US" smtClean="0"/>
+              <a:rPr lang="en-US"/>
               <a:t>Third level</a:t>
             </a:r>
           </a:p>
           <a:p>
             <a:pPr lvl="3"/>
             <a:r>
-              <a:rPr lang="en-US" smtClean="0"/>
+              <a:rPr lang="en-US"/>
               <a:t>Fourth level</a:t>
             </a:r>
           </a:p>
           <a:p>
             <a:pPr lvl="4"/>
             <a:r>
-              <a:rPr lang="en-US" smtClean="0"/>
+              <a:rPr lang="en-US"/>
               <a:t>Fifth level</a:t>
             </a:r>
-            <a:endParaRPr lang="en-US"/>
           </a:p>
         </p:txBody>
       </p:sp>
@@ -1351,7 +1355,7 @@
           <a:p>
             <a:fld id="{5BCAD085-E8A6-8845-BD4E-CB4CCA059FC4}" type="datetimeFigureOut">
               <a:rPr lang="en-US" smtClean="0"/>
-              <a:t>1/27/13</a:t>
+              <a:t>7/9/2026</a:t>
             </a:fld>
             <a:endParaRPr lang="en-US"/>
           </a:p>
@@ -1449,10 +1453,9 @@
           </a:lstStyle>
           <a:p>
             <a:r>
-              <a:rPr lang="en-US" smtClean="0"/>
+              <a:rPr lang="en-US"/>
               <a:t>Click to edit Master title style</a:t>
             </a:r>
-            <a:endParaRPr lang="en-US"/>
           </a:p>
         </p:txBody>
       </p:sp>
@@ -1515,7 +1518,7 @@
           <a:p>
             <a:pPr lvl="0"/>
             <a:r>
-              <a:rPr lang="en-US" smtClean="0"/>
+              <a:rPr lang="en-US"/>
               <a:t>Click to edit Master text styles</a:t>
             </a:r>
           </a:p>
@@ -1571,38 +1574,37 @@
           <a:p>
             <a:pPr lvl="0"/>
             <a:r>
-              <a:rPr lang="en-US" smtClean="0"/>
+              <a:rPr lang="en-US"/>
               <a:t>Click to edit Master text styles</a:t>
             </a:r>
           </a:p>
           <a:p>
             <a:pPr lvl="1"/>
             <a:r>
-              <a:rPr lang="en-US" smtClean="0"/>
+              <a:rPr lang="en-US"/>
               <a:t>Second level</a:t>
             </a:r>
           </a:p>
           <a:p>
             <a:pPr lvl="2"/>
             <a:r>
-              <a:rPr lang="en-US" smtClean="0"/>
+              <a:rPr lang="en-US"/>
               <a:t>Third level</a:t>
             </a:r>
           </a:p>
           <a:p>
             <a:pPr lvl="3"/>
             <a:r>
-              <a:rPr lang="en-US" smtClean="0"/>
+              <a:rPr lang="en-US"/>
               <a:t>Fourth level</a:t>
             </a:r>
           </a:p>
           <a:p>
             <a:pPr lvl="4"/>
             <a:r>
-              <a:rPr lang="en-US" smtClean="0"/>
+              <a:rPr lang="en-US"/>
               <a:t>Fifth level</a:t>
             </a:r>
-            <a:endParaRPr lang="en-US"/>
           </a:p>
         </p:txBody>
       </p:sp>
@@ -1665,7 +1667,7 @@
           <a:p>
             <a:pPr lvl="0"/>
             <a:r>
-              <a:rPr lang="en-US" smtClean="0"/>
+              <a:rPr lang="en-US"/>
               <a:t>Click to edit Master text styles</a:t>
             </a:r>
           </a:p>
@@ -1721,38 +1723,37 @@
           <a:p>
             <a:pPr lvl="0"/>
             <a:r>
-              <a:rPr lang="en-US" smtClean="0"/>
+              <a:rPr lang="en-US"/>
               <a:t>Click to edit Master text styles</a:t>
             </a:r>
           </a:p>
           <a:p>
             <a:pPr lvl="1"/>
             <a:r>
-              <a:rPr lang="en-US" smtClean="0"/>
+              <a:rPr lang="en-US"/>
               <a:t>Second level</a:t>
             </a:r>
           </a:p>
           <a:p>
             <a:pPr lvl="2"/>
             <a:r>
-              <a:rPr lang="en-US" smtClean="0"/>
+              <a:rPr lang="en-US"/>
               <a:t>Third level</a:t>
             </a:r>
           </a:p>
           <a:p>
             <a:pPr lvl="3"/>
             <a:r>
-              <a:rPr lang="en-US" smtClean="0"/>
+              <a:rPr lang="en-US"/>
               <a:t>Fourth level</a:t>
             </a:r>
           </a:p>
           <a:p>
             <a:pPr lvl="4"/>
             <a:r>
-              <a:rPr lang="en-US" smtClean="0"/>
+              <a:rPr lang="en-US"/>
               <a:t>Fifth level</a:t>
             </a:r>
-            <a:endParaRPr lang="en-US"/>
           </a:p>
         </p:txBody>
       </p:sp>
@@ -1773,7 +1774,7 @@
           <a:p>
             <a:fld id="{5BCAD085-E8A6-8845-BD4E-CB4CCA059FC4}" type="datetimeFigureOut">
               <a:rPr lang="en-US" smtClean="0"/>
-              <a:t>1/27/13</a:t>
+              <a:t>7/9/2026</a:t>
             </a:fld>
             <a:endParaRPr lang="en-US"/>
           </a:p>
@@ -1867,10 +1868,9 @@
           <a:lstStyle/>
           <a:p>
             <a:r>
-              <a:rPr lang="en-US" smtClean="0"/>
+              <a:rPr lang="en-US"/>
               <a:t>Click to edit Master title style</a:t>
             </a:r>
-            <a:endParaRPr lang="en-US"/>
           </a:p>
         </p:txBody>
       </p:sp>
@@ -1891,7 +1891,7 @@
           <a:p>
             <a:fld id="{5BCAD085-E8A6-8845-BD4E-CB4CCA059FC4}" type="datetimeFigureOut">
               <a:rPr lang="en-US" smtClean="0"/>
-              <a:t>1/27/13</a:t>
+              <a:t>7/9/2026</a:t>
             </a:fld>
             <a:endParaRPr lang="en-US"/>
           </a:p>
@@ -1986,7 +1986,7 @@
           <a:p>
             <a:fld id="{5BCAD085-E8A6-8845-BD4E-CB4CCA059FC4}" type="datetimeFigureOut">
               <a:rPr lang="en-US" smtClean="0"/>
-              <a:t>1/27/13</a:t>
+              <a:t>7/9/2026</a:t>
             </a:fld>
             <a:endParaRPr lang="en-US"/>
           </a:p>
@@ -2089,10 +2089,9 @@
           </a:lstStyle>
           <a:p>
             <a:r>
-              <a:rPr lang="en-US" smtClean="0"/>
+              <a:rPr lang="en-US"/>
               <a:t>Click to edit Master title style</a:t>
             </a:r>
-            <a:endParaRPr lang="en-US"/>
           </a:p>
         </p:txBody>
       </p:sp>
@@ -2146,38 +2145,37 @@
           <a:p>
             <a:pPr lvl="0"/>
             <a:r>
-              <a:rPr lang="en-US" smtClean="0"/>
+              <a:rPr lang="en-US"/>
               <a:t>Click to edit Master text styles</a:t>
             </a:r>
           </a:p>
           <a:p>
             <a:pPr lvl="1"/>
             <a:r>
-              <a:rPr lang="en-US" smtClean="0"/>
+              <a:rPr lang="en-US"/>
               <a:t>Second level</a:t>
             </a:r>
           </a:p>
           <a:p>
             <a:pPr lvl="2"/>
             <a:r>
-              <a:rPr lang="en-US" smtClean="0"/>
+              <a:rPr lang="en-US"/>
               <a:t>Third level</a:t>
             </a:r>
           </a:p>
           <a:p>
             <a:pPr lvl="3"/>
             <a:r>
-              <a:rPr lang="en-US" smtClean="0"/>
+              <a:rPr lang="en-US"/>
               <a:t>Fourth level</a:t>
             </a:r>
           </a:p>
           <a:p>
             <a:pPr lvl="4"/>
             <a:r>
-              <a:rPr lang="en-US" smtClean="0"/>
+              <a:rPr lang="en-US"/>
               <a:t>Fifth level</a:t>
             </a:r>
-            <a:endParaRPr lang="en-US"/>
           </a:p>
         </p:txBody>
       </p:sp>
@@ -2240,7 +2238,7 @@
           <a:p>
             <a:pPr lvl="0"/>
             <a:r>
-              <a:rPr lang="en-US" smtClean="0"/>
+              <a:rPr lang="en-US"/>
               <a:t>Click to edit Master text styles</a:t>
             </a:r>
           </a:p>
@@ -2263,7 +2261,7 @@
           <a:p>
             <a:fld id="{5BCAD085-E8A6-8845-BD4E-CB4CCA059FC4}" type="datetimeFigureOut">
               <a:rPr lang="en-US" smtClean="0"/>
-              <a:t>1/27/13</a:t>
+              <a:t>7/9/2026</a:t>
             </a:fld>
             <a:endParaRPr lang="en-US"/>
           </a:p>
@@ -2366,10 +2364,9 @@
           </a:lstStyle>
           <a:p>
             <a:r>
-              <a:rPr lang="en-US" smtClean="0"/>
+              <a:rPr lang="en-US"/>
               <a:t>Click to edit Master title style</a:t>
             </a:r>
-            <a:endParaRPr lang="en-US"/>
           </a:p>
         </p:txBody>
       </p:sp>
@@ -2493,7 +2490,7 @@
           <a:p>
             <a:pPr lvl="0"/>
             <a:r>
-              <a:rPr lang="en-US" smtClean="0"/>
+              <a:rPr lang="en-US"/>
               <a:t>Click to edit Master text styles</a:t>
             </a:r>
           </a:p>
@@ -2516,7 +2513,7 @@
           <a:p>
             <a:fld id="{5BCAD085-E8A6-8845-BD4E-CB4CCA059FC4}" type="datetimeFigureOut">
               <a:rPr lang="en-US" smtClean="0"/>
-              <a:t>1/27/13</a:t>
+              <a:t>7/9/2026</a:t>
             </a:fld>
             <a:endParaRPr lang="en-US"/>
           </a:p>
@@ -2625,10 +2622,9 @@
           <a:lstStyle/>
           <a:p>
             <a:r>
-              <a:rPr lang="en-US" smtClean="0"/>
+              <a:rPr lang="en-US"/>
               <a:t>Click to edit Master title style</a:t>
             </a:r>
-            <a:endParaRPr lang="en-US"/>
           </a:p>
         </p:txBody>
       </p:sp>
@@ -2659,38 +2655,37 @@
           <a:p>
             <a:pPr lvl="0"/>
             <a:r>
-              <a:rPr lang="en-US" smtClean="0"/>
+              <a:rPr lang="en-US"/>
               <a:t>Click to edit Master text styles</a:t>
             </a:r>
           </a:p>
           <a:p>
             <a:pPr lvl="1"/>
             <a:r>
-              <a:rPr lang="en-US" smtClean="0"/>
+              <a:rPr lang="en-US"/>
               <a:t>Second level</a:t>
             </a:r>
           </a:p>
           <a:p>
             <a:pPr lvl="2"/>
             <a:r>
-              <a:rPr lang="en-US" smtClean="0"/>
+              <a:rPr lang="en-US"/>
               <a:t>Third level</a:t>
             </a:r>
           </a:p>
           <a:p>
             <a:pPr lvl="3"/>
             <a:r>
-              <a:rPr lang="en-US" smtClean="0"/>
+              <a:rPr lang="en-US"/>
               <a:t>Fourth level</a:t>
             </a:r>
           </a:p>
           <a:p>
             <a:pPr lvl="4"/>
             <a:r>
-              <a:rPr lang="en-US" smtClean="0"/>
+              <a:rPr lang="en-US"/>
               <a:t>Fifth level</a:t>
             </a:r>
-            <a:endParaRPr lang="en-US"/>
           </a:p>
         </p:txBody>
       </p:sp>
@@ -2729,7 +2724,7 @@
           <a:p>
             <a:fld id="{5BCAD085-E8A6-8845-BD4E-CB4CCA059FC4}" type="datetimeFigureOut">
               <a:rPr lang="en-US" smtClean="0"/>
-              <a:t>1/27/13</a:t>
+              <a:t>7/9/2026</a:t>
             </a:fld>
             <a:endParaRPr lang="en-US"/>
           </a:p>
@@ -3088,7 +3083,7 @@
 </file>
 
 <file path=ppt/slides/slide1.xml><?xml version="1.0" encoding="utf-8"?>
-<p:sld xmlns:a="http://schemas.openxmlformats.org/drawingml/2006/main" xmlns:p="http://schemas.openxmlformats.org/presentationml/2006/main" xmlns:r="http://schemas.openxmlformats.org/officeDocument/2006/relationships">
+<p:sld xmlns:a="http://schemas.openxmlformats.org/drawingml/2006/main" xmlns:r="http://schemas.openxmlformats.org/officeDocument/2006/relationships" xmlns:p="http://schemas.openxmlformats.org/presentationml/2006/main">
   <p:cSld>
     <p:spTree>
       <p:nvGrpSpPr>
@@ -3096,7 +3091,14 @@
         <p:cNvGrpSpPr/>
         <p:nvPr/>
       </p:nvGrpSpPr>
-      <p:grpSpPr/>
+      <p:grpSpPr>
+        <a:xfrm>
+          <a:off x="0" y="0"/>
+          <a:ext cx="0" cy="0"/>
+          <a:chOff x="0" y="0"/>
+          <a:chExt cx="0" cy="0"/>
+        </a:xfrm>
+      </p:grpSpPr>
       <p:sp>
         <p:nvSpPr>
           <p:cNvPr id="2" name="Rectangle 1"/>
@@ -3138,6 +3140,7 @@
           <a:lstStyle/>
           <a:p>
             <a:pPr algn="ctr"/>
+            <a:endParaRPr/>
           </a:p>
         </p:txBody>
       </p:sp>
@@ -3181,6 +3184,7 @@
           <a:lstStyle/>
           <a:p>
             <a:pPr algn="ctr"/>
+            <a:endParaRPr/>
           </a:p>
         </p:txBody>
       </p:sp>
@@ -3207,15 +3211,32 @@
           <a:lstStyle/>
           <a:p>
             <a:r>
-              <a:rPr sz="4400" b="1">
+              <a:rPr sz="4400" b="1" dirty="0">
                 <a:solidFill>
                   <a:srgbClr val="FFFFFF"/>
                 </a:solidFill>
                 <a:latin typeface="맑은 고딕"/>
                 <a:ea typeface="맑은 고딕"/>
               </a:rPr>
-              <a:t>PQC 세미나</a:t>
-            </a:r>
+              <a:t>PQC </a:t>
+            </a:r>
+            <a:r>
+              <a:rPr sz="4400" b="1" dirty="0" err="1">
+                <a:solidFill>
+                  <a:srgbClr val="FFFFFF"/>
+                </a:solidFill>
+                <a:latin typeface="맑은 고딕"/>
+                <a:ea typeface="맑은 고딕"/>
+              </a:rPr>
+              <a:t>세미나</a:t>
+            </a:r>
+            <a:endParaRPr sz="4400" b="1" dirty="0">
+              <a:solidFill>
+                <a:srgbClr val="FFFFFF"/>
+              </a:solidFill>
+              <a:latin typeface="맑은 고딕"/>
+              <a:ea typeface="맑은 고딕"/>
+            </a:endParaRPr>
           </a:p>
           <a:p>
             <a:pPr>
@@ -3224,14 +3245,64 @@
               </a:spcBef>
             </a:pPr>
             <a:r>
-              <a:rPr sz="2200" b="0">
+              <a:rPr sz="2200" b="0" dirty="0" err="1">
                 <a:solidFill>
                   <a:srgbClr val="C9D8EA"/>
                 </a:solidFill>
                 <a:latin typeface="맑은 고딕"/>
                 <a:ea typeface="맑은 고딕"/>
               </a:rPr>
-              <a:t>학습 및 발표 계획  +  Lattice-Based Cryptography 1강 Introduction</a:t>
+              <a:t>학습</a:t>
+            </a:r>
+            <a:r>
+              <a:rPr sz="2200" b="0" dirty="0">
+                <a:solidFill>
+                  <a:srgbClr val="C9D8EA"/>
+                </a:solidFill>
+                <a:latin typeface="맑은 고딕"/>
+                <a:ea typeface="맑은 고딕"/>
+              </a:rPr>
+              <a:t> 및 </a:t>
+            </a:r>
+            <a:r>
+              <a:rPr sz="2200" b="0" dirty="0" err="1">
+                <a:solidFill>
+                  <a:srgbClr val="C9D8EA"/>
+                </a:solidFill>
+                <a:latin typeface="맑은 고딕"/>
+                <a:ea typeface="맑은 고딕"/>
+              </a:rPr>
+              <a:t>발표</a:t>
+            </a:r>
+            <a:r>
+              <a:rPr sz="2200" b="0" dirty="0">
+                <a:solidFill>
+                  <a:srgbClr val="C9D8EA"/>
+                </a:solidFill>
+                <a:latin typeface="맑은 고딕"/>
+                <a:ea typeface="맑은 고딕"/>
+              </a:rPr>
+              <a:t> </a:t>
+            </a:r>
+            <a:r>
+              <a:rPr sz="2200" b="0" dirty="0" err="1">
+                <a:solidFill>
+                  <a:srgbClr val="C9D8EA"/>
+                </a:solidFill>
+                <a:latin typeface="맑은 고딕"/>
+                <a:ea typeface="맑은 고딕"/>
+              </a:rPr>
+              <a:t>계획</a:t>
+            </a:r>
+            <a:r>
+              <a:rPr sz="2200" b="0" dirty="0">
+                <a:solidFill>
+                  <a:srgbClr val="C9D8EA"/>
+                </a:solidFill>
+                <a:latin typeface="맑은 고딕"/>
+                <a:ea typeface="맑은 고딕"/>
+              </a:rPr>
+              <a:t>  +  Lattice-Based Cryptography 1강 Introduction</a:t>
             </a:r>
           </a:p>
         </p:txBody>
@@ -3297,7 +3368,7 @@
 </file>
 
 <file path=ppt/slides/slide10.xml><?xml version="1.0" encoding="utf-8"?>
-<p:sld xmlns:a="http://schemas.openxmlformats.org/drawingml/2006/main" xmlns:p="http://schemas.openxmlformats.org/presentationml/2006/main" xmlns:r="http://schemas.openxmlformats.org/officeDocument/2006/relationships">
+<p:sld xmlns:a="http://schemas.openxmlformats.org/drawingml/2006/main" xmlns:r="http://schemas.openxmlformats.org/officeDocument/2006/relationships" xmlns:p="http://schemas.openxmlformats.org/presentationml/2006/main">
   <p:cSld>
     <p:spTree>
       <p:nvGrpSpPr>
@@ -3305,7 +3376,14 @@
         <p:cNvGrpSpPr/>
         <p:nvPr/>
       </p:nvGrpSpPr>
-      <p:grpSpPr/>
+      <p:grpSpPr>
+        <a:xfrm>
+          <a:off x="0" y="0"/>
+          <a:ext cx="0" cy="0"/>
+          <a:chOff x="0" y="0"/>
+          <a:chExt cx="0" cy="0"/>
+        </a:xfrm>
+      </p:grpSpPr>
       <p:sp>
         <p:nvSpPr>
           <p:cNvPr id="2" name="Rectangle 1"/>
@@ -3347,6 +3425,7 @@
           <a:lstStyle/>
           <a:p>
             <a:pPr algn="ctr"/>
+            <a:endParaRPr/>
           </a:p>
         </p:txBody>
       </p:sp>
@@ -3412,7 +3491,7 @@
 </file>
 
 <file path=ppt/slides/slide2.xml><?xml version="1.0" encoding="utf-8"?>
-<p:sld xmlns:a="http://schemas.openxmlformats.org/drawingml/2006/main" xmlns:p="http://schemas.openxmlformats.org/presentationml/2006/main" xmlns:r="http://schemas.openxmlformats.org/officeDocument/2006/relationships">
+<p:sld xmlns:a="http://schemas.openxmlformats.org/drawingml/2006/main" xmlns:r="http://schemas.openxmlformats.org/officeDocument/2006/relationships" xmlns:p="http://schemas.openxmlformats.org/presentationml/2006/main">
   <p:cSld>
     <p:spTree>
       <p:nvGrpSpPr>
@@ -3420,7 +3499,14 @@
         <p:cNvGrpSpPr/>
         <p:nvPr/>
       </p:nvGrpSpPr>
-      <p:grpSpPr/>
+      <p:grpSpPr>
+        <a:xfrm>
+          <a:off x="0" y="0"/>
+          <a:ext cx="0" cy="0"/>
+          <a:chOff x="0" y="0"/>
+          <a:chExt cx="0" cy="0"/>
+        </a:xfrm>
+      </p:grpSpPr>
       <p:sp>
         <p:nvSpPr>
           <p:cNvPr id="2" name="Rectangle 1"/>
@@ -3461,6 +3547,7 @@
           <a:lstStyle/>
           <a:p>
             <a:pPr algn="ctr"/>
+            <a:endParaRPr/>
           </a:p>
         </p:txBody>
       </p:sp>
@@ -3690,7 +3777,15 @@
               <a:t>PQC 세미나 — 2026.07.09  |  학습 계획 + 1강</a:t>
             </a:r>
           </a:p>
-          <a:p/>
+          <a:p>
+            <a:endParaRPr sz="1000" b="0">
+              <a:solidFill>
+                <a:srgbClr val="5A5A5A"/>
+              </a:solidFill>
+              <a:latin typeface="맑은 고딕"/>
+              <a:ea typeface="맑은 고딕"/>
+            </a:endParaRPr>
+          </a:p>
         </p:txBody>
       </p:sp>
       <p:sp>
@@ -3738,7 +3833,7 @@
 </file>
 
 <file path=ppt/slides/slide3.xml><?xml version="1.0" encoding="utf-8"?>
-<p:sld xmlns:a="http://schemas.openxmlformats.org/drawingml/2006/main" xmlns:p="http://schemas.openxmlformats.org/presentationml/2006/main" xmlns:r="http://schemas.openxmlformats.org/officeDocument/2006/relationships">
+<p:sld xmlns:a="http://schemas.openxmlformats.org/drawingml/2006/main" xmlns:r="http://schemas.openxmlformats.org/officeDocument/2006/relationships" xmlns:p="http://schemas.openxmlformats.org/presentationml/2006/main">
   <p:cSld>
     <p:spTree>
       <p:nvGrpSpPr>
@@ -3746,7 +3841,14 @@
         <p:cNvGrpSpPr/>
         <p:nvPr/>
       </p:nvGrpSpPr>
-      <p:grpSpPr/>
+      <p:grpSpPr>
+        <a:xfrm>
+          <a:off x="0" y="0"/>
+          <a:ext cx="0" cy="0"/>
+          <a:chOff x="0" y="0"/>
+          <a:chExt cx="0" cy="0"/>
+        </a:xfrm>
+      </p:grpSpPr>
       <p:sp>
         <p:nvSpPr>
           <p:cNvPr id="2" name="Rectangle 1"/>
@@ -3787,6 +3889,7 @@
           <a:lstStyle/>
           <a:p>
             <a:pPr algn="ctr"/>
+            <a:endParaRPr/>
           </a:p>
         </p:txBody>
       </p:sp>
@@ -3879,9 +3982,27 @@
                 <a:tableStyleId>{5C22544A-7EE6-4342-B048-85BDC9FD1C3A}</a:tableStyleId>
               </a:tblPr>
               <a:tblGrid>
-                <a:gridCol w="822960"/>
-                <a:gridCol w="5029200"/>
-                <a:gridCol w="4754880"/>
+                <a:gridCol w="822960">
+                  <a:extLst>
+                    <a:ext uri="{9D8B030D-6E8A-4147-A177-3AD203B41FA5}">
+                      <a16:colId xmlns:a16="http://schemas.microsoft.com/office/drawing/2014/main" val="20000"/>
+                    </a:ext>
+                  </a:extLst>
+                </a:gridCol>
+                <a:gridCol w="5029200">
+                  <a:extLst>
+                    <a:ext uri="{9D8B030D-6E8A-4147-A177-3AD203B41FA5}">
+                      <a16:colId xmlns:a16="http://schemas.microsoft.com/office/drawing/2014/main" val="20001"/>
+                    </a:ext>
+                  </a:extLst>
+                </a:gridCol>
+                <a:gridCol w="4754880">
+                  <a:extLst>
+                    <a:ext uri="{9D8B030D-6E8A-4147-A177-3AD203B41FA5}">
+                      <a16:colId xmlns:a16="http://schemas.microsoft.com/office/drawing/2014/main" val="20002"/>
+                    </a:ext>
+                  </a:extLst>
+                </a:gridCol>
               </a:tblGrid>
               <a:tr h="480060">
                 <a:tc>
@@ -3939,14 +4060,24 @@
                     <a:p>
                       <a:pPr algn="ctr"/>
                       <a:r>
-                        <a:rPr sz="1400" b="1">
+                        <a:rPr sz="1400" b="1" dirty="0" err="1">
                           <a:solidFill>
                             <a:srgbClr val="FFFFFF"/>
                           </a:solidFill>
                           <a:latin typeface="맑은 고딕"/>
                           <a:ea typeface="맑은 고딕"/>
                         </a:rPr>
-                        <a:t>강의 수</a:t>
+                        <a:t>강의</a:t>
+                      </a:r>
+                      <a:r>
+                        <a:rPr sz="1400" b="1" dirty="0">
+                          <a:solidFill>
+                            <a:srgbClr val="FFFFFF"/>
+                          </a:solidFill>
+                          <a:latin typeface="맑은 고딕"/>
+                          <a:ea typeface="맑은 고딕"/>
+                        </a:rPr>
+                        <a:t> 수</a:t>
                       </a:r>
                     </a:p>
                   </a:txBody>
@@ -3956,6 +4087,11 @@
                     </a:solidFill>
                   </a:tcPr>
                 </a:tc>
+                <a:extLst>
+                  <a:ext uri="{0D108BD9-81ED-4DB2-BD59-A6C34878D82A}">
+                    <a16:rowId xmlns:a16="http://schemas.microsoft.com/office/drawing/2014/main" val="10000"/>
+                  </a:ext>
+                </a:extLst>
               </a:tr>
               <a:tr h="480060">
                 <a:tc>
@@ -4030,6 +4166,11 @@
                     </a:solidFill>
                   </a:tcPr>
                 </a:tc>
+                <a:extLst>
+                  <a:ext uri="{0D108BD9-81ED-4DB2-BD59-A6C34878D82A}">
+                    <a16:rowId xmlns:a16="http://schemas.microsoft.com/office/drawing/2014/main" val="10001"/>
+                  </a:ext>
+                </a:extLst>
               </a:tr>
               <a:tr h="480060">
                 <a:tc>
@@ -4104,6 +4245,11 @@
                     </a:solidFill>
                   </a:tcPr>
                 </a:tc>
+                <a:extLst>
+                  <a:ext uri="{0D108BD9-81ED-4DB2-BD59-A6C34878D82A}">
+                    <a16:rowId xmlns:a16="http://schemas.microsoft.com/office/drawing/2014/main" val="10002"/>
+                  </a:ext>
+                </a:extLst>
               </a:tr>
               <a:tr h="480060">
                 <a:tc>
@@ -4161,7 +4307,7 @@
                     <a:p>
                       <a:pPr algn="ctr"/>
                       <a:r>
-                        <a:rPr sz="1400" b="0">
+                        <a:rPr sz="1400" b="0" dirty="0">
                           <a:solidFill>
                             <a:srgbClr val="2B2B2B"/>
                           </a:solidFill>
@@ -4178,6 +4324,11 @@
                     </a:solidFill>
                   </a:tcPr>
                 </a:tc>
+                <a:extLst>
+                  <a:ext uri="{0D108BD9-81ED-4DB2-BD59-A6C34878D82A}">
+                    <a16:rowId xmlns:a16="http://schemas.microsoft.com/office/drawing/2014/main" val="10003"/>
+                  </a:ext>
+                </a:extLst>
               </a:tr>
             </a:tbl>
           </a:graphicData>
@@ -4214,15 +4365,92 @@
               </a:spcAft>
             </a:pPr>
             <a:r>
-              <a:rPr sz="1800" b="1">
+              <a:rPr sz="1800" b="1" dirty="0">
                 <a:solidFill>
                   <a:srgbClr val="2B2B2B"/>
                 </a:solidFill>
                 <a:latin typeface="맑은 고딕"/>
                 <a:ea typeface="맑은 고딕"/>
               </a:rPr>
-              <a:t>▪  순서를 이렇게 배치한 이유</a:t>
-            </a:r>
+              <a:t>▪  </a:t>
+            </a:r>
+            <a:r>
+              <a:rPr sz="1800" b="1" dirty="0" err="1">
+                <a:solidFill>
+                  <a:srgbClr val="2B2B2B"/>
+                </a:solidFill>
+                <a:latin typeface="맑은 고딕"/>
+                <a:ea typeface="맑은 고딕"/>
+              </a:rPr>
+              <a:t>순서를</a:t>
+            </a:r>
+            <a:r>
+              <a:rPr sz="1800" b="1" dirty="0">
+                <a:solidFill>
+                  <a:srgbClr val="2B2B2B"/>
+                </a:solidFill>
+                <a:latin typeface="맑은 고딕"/>
+                <a:ea typeface="맑은 고딕"/>
+              </a:rPr>
+              <a:t> </a:t>
+            </a:r>
+            <a:r>
+              <a:rPr sz="1800" b="1" dirty="0" err="1">
+                <a:solidFill>
+                  <a:srgbClr val="2B2B2B"/>
+                </a:solidFill>
+                <a:latin typeface="맑은 고딕"/>
+                <a:ea typeface="맑은 고딕"/>
+              </a:rPr>
+              <a:t>이렇게</a:t>
+            </a:r>
+            <a:r>
+              <a:rPr sz="1800" b="1" dirty="0">
+                <a:solidFill>
+                  <a:srgbClr val="2B2B2B"/>
+                </a:solidFill>
+                <a:latin typeface="맑은 고딕"/>
+                <a:ea typeface="맑은 고딕"/>
+              </a:rPr>
+              <a:t> </a:t>
+            </a:r>
+            <a:r>
+              <a:rPr sz="1800" b="1" dirty="0" err="1">
+                <a:solidFill>
+                  <a:srgbClr val="2B2B2B"/>
+                </a:solidFill>
+                <a:latin typeface="맑은 고딕"/>
+                <a:ea typeface="맑은 고딕"/>
+              </a:rPr>
+              <a:t>배치한</a:t>
+            </a:r>
+            <a:r>
+              <a:rPr sz="1800" b="1" dirty="0">
+                <a:solidFill>
+                  <a:srgbClr val="2B2B2B"/>
+                </a:solidFill>
+                <a:latin typeface="맑은 고딕"/>
+                <a:ea typeface="맑은 고딕"/>
+              </a:rPr>
+              <a:t> </a:t>
+            </a:r>
+            <a:r>
+              <a:rPr sz="1800" b="1" dirty="0" err="1">
+                <a:solidFill>
+                  <a:srgbClr val="2B2B2B"/>
+                </a:solidFill>
+                <a:latin typeface="맑은 고딕"/>
+                <a:ea typeface="맑은 고딕"/>
+              </a:rPr>
+              <a:t>이유</a:t>
+            </a:r>
+            <a:endParaRPr sz="1800" b="1" dirty="0">
+              <a:solidFill>
+                <a:srgbClr val="2B2B2B"/>
+              </a:solidFill>
+              <a:latin typeface="맑은 고딕"/>
+              <a:ea typeface="맑은 고딕"/>
+            </a:endParaRPr>
           </a:p>
           <a:p>
             <a:pPr>
@@ -4234,15 +4462,152 @@
               </a:spcAft>
             </a:pPr>
             <a:r>
-              <a:rPr sz="1500" b="0">
+              <a:rPr sz="1500" b="0" dirty="0">
                 <a:solidFill>
                   <a:srgbClr val="5A5A5A"/>
                 </a:solidFill>
                 <a:latin typeface="맑은 고딕"/>
                 <a:ea typeface="맑은 고딕"/>
               </a:rPr>
-              <a:t>     –  Lattice-Based 코스의 SIS·LWE·Module-LWE 개념이 Kyber·Dilithium 이해의 전제 조건</a:t>
-            </a:r>
+              <a:t>     –  Lattice-Based </a:t>
+            </a:r>
+            <a:r>
+              <a:rPr sz="1500" b="0" dirty="0" err="1">
+                <a:solidFill>
+                  <a:srgbClr val="5A5A5A"/>
+                </a:solidFill>
+                <a:latin typeface="맑은 고딕"/>
+                <a:ea typeface="맑은 고딕"/>
+              </a:rPr>
+              <a:t>코스의</a:t>
+            </a:r>
+            <a:r>
+              <a:rPr sz="1500" b="0" dirty="0">
+                <a:solidFill>
+                  <a:srgbClr val="5A5A5A"/>
+                </a:solidFill>
+                <a:latin typeface="맑은 고딕"/>
+                <a:ea typeface="맑은 고딕"/>
+              </a:rPr>
+              <a:t> </a:t>
+            </a:r>
+            <a:r>
+              <a:rPr sz="1500" b="0" dirty="0" err="1">
+                <a:solidFill>
+                  <a:srgbClr val="5A5A5A"/>
+                </a:solidFill>
+                <a:latin typeface="맑은 고딕"/>
+                <a:ea typeface="맑은 고딕"/>
+              </a:rPr>
+              <a:t>SIS·LWE·Module-LWE</a:t>
+            </a:r>
+            <a:r>
+              <a:rPr sz="1500" b="0" dirty="0">
+                <a:solidFill>
+                  <a:srgbClr val="5A5A5A"/>
+                </a:solidFill>
+                <a:latin typeface="맑은 고딕"/>
+                <a:ea typeface="맑은 고딕"/>
+              </a:rPr>
+              <a:t> </a:t>
+            </a:r>
+            <a:r>
+              <a:rPr sz="1500" b="0" dirty="0" err="1">
+                <a:solidFill>
+                  <a:srgbClr val="5A5A5A"/>
+                </a:solidFill>
+                <a:latin typeface="맑은 고딕"/>
+                <a:ea typeface="맑은 고딕"/>
+              </a:rPr>
+              <a:t>개념이</a:t>
+            </a:r>
+            <a:r>
+              <a:rPr sz="1500" b="0" dirty="0">
+                <a:solidFill>
+                  <a:srgbClr val="5A5A5A"/>
+                </a:solidFill>
+                <a:latin typeface="맑은 고딕"/>
+                <a:ea typeface="맑은 고딕"/>
+              </a:rPr>
+              <a:t> </a:t>
+            </a:r>
+            <a:r>
+              <a:rPr sz="1500" b="0" dirty="0" err="1">
+                <a:solidFill>
+                  <a:srgbClr val="5A5A5A"/>
+                </a:solidFill>
+                <a:latin typeface="맑은 고딕"/>
+                <a:ea typeface="맑은 고딕"/>
+              </a:rPr>
+              <a:t>Kyber·Dilithium</a:t>
+            </a:r>
+            <a:r>
+              <a:rPr sz="1500" b="0" dirty="0">
+                <a:solidFill>
+                  <a:srgbClr val="5A5A5A"/>
+                </a:solidFill>
+                <a:latin typeface="맑은 고딕"/>
+                <a:ea typeface="맑은 고딕"/>
+              </a:rPr>
+              <a:t> </a:t>
+            </a:r>
+            <a:r>
+              <a:rPr sz="1500" b="0" dirty="0" err="1">
+                <a:solidFill>
+                  <a:srgbClr val="5A5A5A"/>
+                </a:solidFill>
+                <a:latin typeface="맑은 고딕"/>
+                <a:ea typeface="맑은 고딕"/>
+              </a:rPr>
+              <a:t>이해의</a:t>
+            </a:r>
+            <a:r>
+              <a:rPr sz="1500" b="0" dirty="0">
+                <a:solidFill>
+                  <a:srgbClr val="5A5A5A"/>
+                </a:solidFill>
+                <a:latin typeface="맑은 고딕"/>
+                <a:ea typeface="맑은 고딕"/>
+              </a:rPr>
+              <a:t> </a:t>
+            </a:r>
+            <a:r>
+              <a:rPr sz="1500" b="0" dirty="0" err="1">
+                <a:solidFill>
+                  <a:srgbClr val="5A5A5A"/>
+                </a:solidFill>
+                <a:latin typeface="맑은 고딕"/>
+                <a:ea typeface="맑은 고딕"/>
+              </a:rPr>
+              <a:t>전제</a:t>
+            </a:r>
+            <a:r>
+              <a:rPr sz="1500" b="0" dirty="0">
+                <a:solidFill>
+                  <a:srgbClr val="5A5A5A"/>
+                </a:solidFill>
+                <a:latin typeface="맑은 고딕"/>
+                <a:ea typeface="맑은 고딕"/>
+              </a:rPr>
+              <a:t> </a:t>
+            </a:r>
+            <a:r>
+              <a:rPr sz="1500" b="0" dirty="0" err="1">
+                <a:solidFill>
+                  <a:srgbClr val="5A5A5A"/>
+                </a:solidFill>
+                <a:latin typeface="맑은 고딕"/>
+                <a:ea typeface="맑은 고딕"/>
+              </a:rPr>
+              <a:t>조건</a:t>
+            </a:r>
+            <a:endParaRPr sz="1500" b="0" dirty="0">
+              <a:solidFill>
+                <a:srgbClr val="5A5A5A"/>
+              </a:solidFill>
+              <a:latin typeface="맑은 고딕"/>
+              <a:ea typeface="맑은 고딕"/>
+            </a:endParaRPr>
           </a:p>
           <a:p>
             <a:pPr>
@@ -4254,15 +4619,172 @@
               </a:spcAft>
             </a:pPr>
             <a:r>
-              <a:rPr sz="1500" b="0">
+              <a:rPr sz="1500" b="0" dirty="0">
                 <a:solidFill>
                   <a:srgbClr val="5A5A5A"/>
                 </a:solidFill>
                 <a:latin typeface="맑은 고딕"/>
                 <a:ea typeface="맑은 고딕"/>
               </a:rPr>
-              <a:t>     –  Hash-Based Signature는 격자 이론과 독립적이라 마지막에 배치해도 무리 없음</a:t>
-            </a:r>
+              <a:t>     –  Hash-Based </a:t>
+            </a:r>
+            <a:r>
+              <a:rPr sz="1500" b="0" dirty="0" err="1">
+                <a:solidFill>
+                  <a:srgbClr val="5A5A5A"/>
+                </a:solidFill>
+                <a:latin typeface="맑은 고딕"/>
+                <a:ea typeface="맑은 고딕"/>
+              </a:rPr>
+              <a:t>Signature는</a:t>
+            </a:r>
+            <a:r>
+              <a:rPr sz="1500" b="0" dirty="0">
+                <a:solidFill>
+                  <a:srgbClr val="5A5A5A"/>
+                </a:solidFill>
+                <a:latin typeface="맑은 고딕"/>
+                <a:ea typeface="맑은 고딕"/>
+              </a:rPr>
+              <a:t> </a:t>
+            </a:r>
+            <a:r>
+              <a:rPr sz="1500" b="0" dirty="0" err="1">
+                <a:solidFill>
+                  <a:srgbClr val="5A5A5A"/>
+                </a:solidFill>
+                <a:latin typeface="맑은 고딕"/>
+                <a:ea typeface="맑은 고딕"/>
+              </a:rPr>
+              <a:t>격자</a:t>
+            </a:r>
+            <a:r>
+              <a:rPr sz="1500" b="0" dirty="0">
+                <a:solidFill>
+                  <a:srgbClr val="5A5A5A"/>
+                </a:solidFill>
+                <a:latin typeface="맑은 고딕"/>
+                <a:ea typeface="맑은 고딕"/>
+              </a:rPr>
+              <a:t> </a:t>
+            </a:r>
+            <a:r>
+              <a:rPr sz="1500" b="0" dirty="0" err="1">
+                <a:solidFill>
+                  <a:srgbClr val="5A5A5A"/>
+                </a:solidFill>
+                <a:latin typeface="맑은 고딕"/>
+                <a:ea typeface="맑은 고딕"/>
+              </a:rPr>
+              <a:t>이론과</a:t>
+            </a:r>
+            <a:r>
+              <a:rPr sz="1500" b="0" dirty="0">
+                <a:solidFill>
+                  <a:srgbClr val="5A5A5A"/>
+                </a:solidFill>
+                <a:latin typeface="맑은 고딕"/>
+                <a:ea typeface="맑은 고딕"/>
+              </a:rPr>
+              <a:t> </a:t>
+            </a:r>
+            <a:r>
+              <a:rPr sz="1500" b="0" dirty="0" err="1">
+                <a:solidFill>
+                  <a:srgbClr val="5A5A5A"/>
+                </a:solidFill>
+                <a:latin typeface="맑은 고딕"/>
+                <a:ea typeface="맑은 고딕"/>
+              </a:rPr>
+              <a:t>독립적이라</a:t>
+            </a:r>
+            <a:r>
+              <a:rPr sz="1500" b="0" dirty="0">
+                <a:solidFill>
+                  <a:srgbClr val="5A5A5A"/>
+                </a:solidFill>
+                <a:latin typeface="맑은 고딕"/>
+                <a:ea typeface="맑은 고딕"/>
+              </a:rPr>
+              <a:t> </a:t>
+            </a:r>
+            <a:r>
+              <a:rPr sz="1500" b="0" dirty="0" err="1">
+                <a:solidFill>
+                  <a:srgbClr val="5A5A5A"/>
+                </a:solidFill>
+                <a:latin typeface="맑은 고딕"/>
+                <a:ea typeface="맑은 고딕"/>
+              </a:rPr>
+              <a:t>마지막에</a:t>
+            </a:r>
+            <a:r>
+              <a:rPr sz="1500" b="0" dirty="0">
+                <a:solidFill>
+                  <a:srgbClr val="5A5A5A"/>
+                </a:solidFill>
+                <a:latin typeface="맑은 고딕"/>
+                <a:ea typeface="맑은 고딕"/>
+              </a:rPr>
+              <a:t> </a:t>
+            </a:r>
+            <a:r>
+              <a:rPr sz="1500" b="0" dirty="0" err="1">
+                <a:solidFill>
+                  <a:srgbClr val="5A5A5A"/>
+                </a:solidFill>
+                <a:latin typeface="맑은 고딕"/>
+                <a:ea typeface="맑은 고딕"/>
+              </a:rPr>
+              <a:t>배치해도</a:t>
+            </a:r>
+            <a:r>
+              <a:rPr sz="1500" b="0" dirty="0">
+                <a:solidFill>
+                  <a:srgbClr val="5A5A5A"/>
+                </a:solidFill>
+                <a:latin typeface="맑은 고딕"/>
+                <a:ea typeface="맑은 고딕"/>
+              </a:rPr>
+              <a:t> </a:t>
+            </a:r>
+            <a:r>
+              <a:rPr sz="1500" b="0" dirty="0" err="1">
+                <a:solidFill>
+                  <a:srgbClr val="5A5A5A"/>
+                </a:solidFill>
+                <a:latin typeface="맑은 고딕"/>
+                <a:ea typeface="맑은 고딕"/>
+              </a:rPr>
+              <a:t>무리</a:t>
+            </a:r>
+            <a:r>
+              <a:rPr sz="1500" b="0" dirty="0">
+                <a:solidFill>
+                  <a:srgbClr val="5A5A5A"/>
+                </a:solidFill>
+                <a:latin typeface="맑은 고딕"/>
+                <a:ea typeface="맑은 고딕"/>
+              </a:rPr>
+              <a:t> </a:t>
+            </a:r>
+            <a:r>
+              <a:rPr sz="1500" b="0" dirty="0" err="1">
+                <a:solidFill>
+                  <a:srgbClr val="5A5A5A"/>
+                </a:solidFill>
+                <a:latin typeface="맑은 고딕"/>
+                <a:ea typeface="맑은 고딕"/>
+              </a:rPr>
+              <a:t>없음</a:t>
+            </a:r>
+            <a:endParaRPr sz="1500" b="0" dirty="0">
+              <a:solidFill>
+                <a:srgbClr val="5A5A5A"/>
+              </a:solidFill>
+              <a:latin typeface="맑은 고딕"/>
+              <a:ea typeface="맑은 고딕"/>
+            </a:endParaRPr>
           </a:p>
         </p:txBody>
       </p:sp>
@@ -4299,7 +4821,15 @@
               <a:t>PQC 세미나 — 2026.07.09  |  학습 계획</a:t>
             </a:r>
           </a:p>
-          <a:p/>
+          <a:p>
+            <a:endParaRPr sz="1000" b="0">
+              <a:solidFill>
+                <a:srgbClr val="5A5A5A"/>
+              </a:solidFill>
+              <a:latin typeface="맑은 고딕"/>
+              <a:ea typeface="맑은 고딕"/>
+            </a:endParaRPr>
+          </a:p>
         </p:txBody>
       </p:sp>
       <p:sp>
@@ -4347,7 +4877,7 @@
 </file>
 
 <file path=ppt/slides/slide4.xml><?xml version="1.0" encoding="utf-8"?>
-<p:sld xmlns:a="http://schemas.openxmlformats.org/drawingml/2006/main" xmlns:p="http://schemas.openxmlformats.org/presentationml/2006/main" xmlns:r="http://schemas.openxmlformats.org/officeDocument/2006/relationships">
+<p:sld xmlns:a="http://schemas.openxmlformats.org/drawingml/2006/main" xmlns:r="http://schemas.openxmlformats.org/officeDocument/2006/relationships" xmlns:p="http://schemas.openxmlformats.org/presentationml/2006/main">
   <p:cSld>
     <p:spTree>
       <p:nvGrpSpPr>
@@ -4355,7 +4885,14 @@
         <p:cNvGrpSpPr/>
         <p:nvPr/>
       </p:nvGrpSpPr>
-      <p:grpSpPr/>
+      <p:grpSpPr>
+        <a:xfrm>
+          <a:off x="0" y="0"/>
+          <a:ext cx="0" cy="0"/>
+          <a:chOff x="0" y="0"/>
+          <a:chExt cx="0" cy="0"/>
+        </a:xfrm>
+      </p:grpSpPr>
       <p:sp>
         <p:nvSpPr>
           <p:cNvPr id="2" name="Rectangle 1"/>
@@ -4396,6 +4933,7 @@
           <a:lstStyle/>
           <a:p>
             <a:pPr algn="ctr"/>
+            <a:endParaRPr/>
           </a:p>
         </p:txBody>
       </p:sp>
@@ -4488,11 +5026,41 @@
                 <a:tableStyleId>{5C22544A-7EE6-4342-B048-85BDC9FD1C3A}</a:tableStyleId>
               </a:tblPr>
               <a:tblGrid>
-                <a:gridCol w="1051560"/>
-                <a:gridCol w="685800"/>
-                <a:gridCol w="2103120"/>
-                <a:gridCol w="1280160"/>
-                <a:gridCol w="6217920"/>
+                <a:gridCol w="1051560">
+                  <a:extLst>
+                    <a:ext uri="{9D8B030D-6E8A-4147-A177-3AD203B41FA5}">
+                      <a16:colId xmlns:a16="http://schemas.microsoft.com/office/drawing/2014/main" val="20000"/>
+                    </a:ext>
+                  </a:extLst>
+                </a:gridCol>
+                <a:gridCol w="685800">
+                  <a:extLst>
+                    <a:ext uri="{9D8B030D-6E8A-4147-A177-3AD203B41FA5}">
+                      <a16:colId xmlns:a16="http://schemas.microsoft.com/office/drawing/2014/main" val="20001"/>
+                    </a:ext>
+                  </a:extLst>
+                </a:gridCol>
+                <a:gridCol w="2103120">
+                  <a:extLst>
+                    <a:ext uri="{9D8B030D-6E8A-4147-A177-3AD203B41FA5}">
+                      <a16:colId xmlns:a16="http://schemas.microsoft.com/office/drawing/2014/main" val="20002"/>
+                    </a:ext>
+                  </a:extLst>
+                </a:gridCol>
+                <a:gridCol w="1280160">
+                  <a:extLst>
+                    <a:ext uri="{9D8B030D-6E8A-4147-A177-3AD203B41FA5}">
+                      <a16:colId xmlns:a16="http://schemas.microsoft.com/office/drawing/2014/main" val="20003"/>
+                    </a:ext>
+                  </a:extLst>
+                </a:gridCol>
+                <a:gridCol w="6217920">
+                  <a:extLst>
+                    <a:ext uri="{9D8B030D-6E8A-4147-A177-3AD203B41FA5}">
+                      <a16:colId xmlns:a16="http://schemas.microsoft.com/office/drawing/2014/main" val="20004"/>
+                    </a:ext>
+                  </a:extLst>
+                </a:gridCol>
               </a:tblGrid>
               <a:tr h="294322">
                 <a:tc>
@@ -4615,6 +5183,11 @@
                     </a:solidFill>
                   </a:tcPr>
                 </a:tc>
+                <a:extLst>
+                  <a:ext uri="{0D108BD9-81ED-4DB2-BD59-A6C34878D82A}">
+                    <a16:rowId xmlns:a16="http://schemas.microsoft.com/office/drawing/2014/main" val="10000"/>
+                  </a:ext>
+                </a:extLst>
               </a:tr>
               <a:tr h="294322">
                 <a:tc>
@@ -4737,6 +5310,11 @@
                     </a:solidFill>
                   </a:tcPr>
                 </a:tc>
+                <a:extLst>
+                  <a:ext uri="{0D108BD9-81ED-4DB2-BD59-A6C34878D82A}">
+                    <a16:rowId xmlns:a16="http://schemas.microsoft.com/office/drawing/2014/main" val="10001"/>
+                  </a:ext>
+                </a:extLst>
               </a:tr>
               <a:tr h="294322">
                 <a:tc>
@@ -4859,6 +5437,11 @@
                     </a:solidFill>
                   </a:tcPr>
                 </a:tc>
+                <a:extLst>
+                  <a:ext uri="{0D108BD9-81ED-4DB2-BD59-A6C34878D82A}">
+                    <a16:rowId xmlns:a16="http://schemas.microsoft.com/office/drawing/2014/main" val="10002"/>
+                  </a:ext>
+                </a:extLst>
               </a:tr>
               <a:tr h="294322">
                 <a:tc>
@@ -4981,6 +5564,11 @@
                     </a:solidFill>
                   </a:tcPr>
                 </a:tc>
+                <a:extLst>
+                  <a:ext uri="{0D108BD9-81ED-4DB2-BD59-A6C34878D82A}">
+                    <a16:rowId xmlns:a16="http://schemas.microsoft.com/office/drawing/2014/main" val="10003"/>
+                  </a:ext>
+                </a:extLst>
               </a:tr>
               <a:tr h="294322">
                 <a:tc>
@@ -5103,6 +5691,11 @@
                     </a:solidFill>
                   </a:tcPr>
                 </a:tc>
+                <a:extLst>
+                  <a:ext uri="{0D108BD9-81ED-4DB2-BD59-A6C34878D82A}">
+                    <a16:rowId xmlns:a16="http://schemas.microsoft.com/office/drawing/2014/main" val="10004"/>
+                  </a:ext>
+                </a:extLst>
               </a:tr>
               <a:tr h="294322">
                 <a:tc>
@@ -5225,6 +5818,11 @@
                     </a:solidFill>
                   </a:tcPr>
                 </a:tc>
+                <a:extLst>
+                  <a:ext uri="{0D108BD9-81ED-4DB2-BD59-A6C34878D82A}">
+                    <a16:rowId xmlns:a16="http://schemas.microsoft.com/office/drawing/2014/main" val="10005"/>
+                  </a:ext>
+                </a:extLst>
               </a:tr>
               <a:tr h="294322">
                 <a:tc>
@@ -5347,6 +5945,11 @@
                     </a:solidFill>
                   </a:tcPr>
                 </a:tc>
+                <a:extLst>
+                  <a:ext uri="{0D108BD9-81ED-4DB2-BD59-A6C34878D82A}">
+                    <a16:rowId xmlns:a16="http://schemas.microsoft.com/office/drawing/2014/main" val="10006"/>
+                  </a:ext>
+                </a:extLst>
               </a:tr>
               <a:tr h="294322">
                 <a:tc>
@@ -5469,6 +6072,11 @@
                     </a:solidFill>
                   </a:tcPr>
                 </a:tc>
+                <a:extLst>
+                  <a:ext uri="{0D108BD9-81ED-4DB2-BD59-A6C34878D82A}">
+                    <a16:rowId xmlns:a16="http://schemas.microsoft.com/office/drawing/2014/main" val="10007"/>
+                  </a:ext>
+                </a:extLst>
               </a:tr>
               <a:tr h="294322">
                 <a:tc>
@@ -5591,6 +6199,11 @@
                     </a:solidFill>
                   </a:tcPr>
                 </a:tc>
+                <a:extLst>
+                  <a:ext uri="{0D108BD9-81ED-4DB2-BD59-A6C34878D82A}">
+                    <a16:rowId xmlns:a16="http://schemas.microsoft.com/office/drawing/2014/main" val="10008"/>
+                  </a:ext>
+                </a:extLst>
               </a:tr>
               <a:tr h="294322">
                 <a:tc>
@@ -5713,6 +6326,11 @@
                     </a:solidFill>
                   </a:tcPr>
                 </a:tc>
+                <a:extLst>
+                  <a:ext uri="{0D108BD9-81ED-4DB2-BD59-A6C34878D82A}">
+                    <a16:rowId xmlns:a16="http://schemas.microsoft.com/office/drawing/2014/main" val="10009"/>
+                  </a:ext>
+                </a:extLst>
               </a:tr>
               <a:tr h="294322">
                 <a:tc>
@@ -5835,6 +6453,11 @@
                     </a:solidFill>
                   </a:tcPr>
                 </a:tc>
+                <a:extLst>
+                  <a:ext uri="{0D108BD9-81ED-4DB2-BD59-A6C34878D82A}">
+                    <a16:rowId xmlns:a16="http://schemas.microsoft.com/office/drawing/2014/main" val="10010"/>
+                  </a:ext>
+                </a:extLst>
               </a:tr>
               <a:tr h="294322">
                 <a:tc>
@@ -5957,6 +6580,11 @@
                     </a:solidFill>
                   </a:tcPr>
                 </a:tc>
+                <a:extLst>
+                  <a:ext uri="{0D108BD9-81ED-4DB2-BD59-A6C34878D82A}">
+                    <a16:rowId xmlns:a16="http://schemas.microsoft.com/office/drawing/2014/main" val="10011"/>
+                  </a:ext>
+                </a:extLst>
               </a:tr>
               <a:tr h="294322">
                 <a:tc>
@@ -6079,6 +6707,11 @@
                     </a:solidFill>
                   </a:tcPr>
                 </a:tc>
+                <a:extLst>
+                  <a:ext uri="{0D108BD9-81ED-4DB2-BD59-A6C34878D82A}">
+                    <a16:rowId xmlns:a16="http://schemas.microsoft.com/office/drawing/2014/main" val="10012"/>
+                  </a:ext>
+                </a:extLst>
               </a:tr>
               <a:tr h="294322">
                 <a:tc>
@@ -6201,6 +6834,11 @@
                     </a:solidFill>
                   </a:tcPr>
                 </a:tc>
+                <a:extLst>
+                  <a:ext uri="{0D108BD9-81ED-4DB2-BD59-A6C34878D82A}">
+                    <a16:rowId xmlns:a16="http://schemas.microsoft.com/office/drawing/2014/main" val="10013"/>
+                  </a:ext>
+                </a:extLst>
               </a:tr>
               <a:tr h="294322">
                 <a:tc>
@@ -6323,6 +6961,11 @@
                     </a:solidFill>
                   </a:tcPr>
                 </a:tc>
+                <a:extLst>
+                  <a:ext uri="{0D108BD9-81ED-4DB2-BD59-A6C34878D82A}">
+                    <a16:rowId xmlns:a16="http://schemas.microsoft.com/office/drawing/2014/main" val="10014"/>
+                  </a:ext>
+                </a:extLst>
               </a:tr>
               <a:tr h="294330">
                 <a:tc>
@@ -6428,14 +7071,54 @@
                     <a:p>
                       <a:pPr algn="ctr"/>
                       <a:r>
-                        <a:rPr sz="1050" b="0">
+                        <a:rPr sz="1050" b="0" dirty="0">
                           <a:solidFill>
                             <a:srgbClr val="2B2B2B"/>
                           </a:solidFill>
                           <a:latin typeface="맑은 고딕"/>
                           <a:ea typeface="맑은 고딕"/>
                         </a:rPr>
-                        <a:t>SPHINCS+ / SLH-DSA (마지막 회차)</a:t>
+                        <a:t>SPHINCS+ / SLH-DSA (</a:t>
+                      </a:r>
+                      <a:r>
+                        <a:rPr sz="1050" b="0" dirty="0" err="1">
+                          <a:solidFill>
+                            <a:srgbClr val="2B2B2B"/>
+                          </a:solidFill>
+                          <a:latin typeface="맑은 고딕"/>
+                          <a:ea typeface="맑은 고딕"/>
+                        </a:rPr>
+                        <a:t>마지막</a:t>
+                      </a:r>
+                      <a:r>
+                        <a:rPr sz="1050" b="0" dirty="0">
+                          <a:solidFill>
+                            <a:srgbClr val="2B2B2B"/>
+                          </a:solidFill>
+                          <a:latin typeface="맑은 고딕"/>
+                          <a:ea typeface="맑은 고딕"/>
+                        </a:rPr>
+                        <a:t> </a:t>
+                      </a:r>
+                      <a:r>
+                        <a:rPr sz="1050" b="0" dirty="0" err="1">
+                          <a:solidFill>
+                            <a:srgbClr val="2B2B2B"/>
+                          </a:solidFill>
+                          <a:latin typeface="맑은 고딕"/>
+                          <a:ea typeface="맑은 고딕"/>
+                        </a:rPr>
+                        <a:t>회차</a:t>
+                      </a:r>
+                      <a:r>
+                        <a:rPr sz="1050" b="0" dirty="0">
+                          <a:solidFill>
+                            <a:srgbClr val="2B2B2B"/>
+                          </a:solidFill>
+                          <a:latin typeface="맑은 고딕"/>
+                          <a:ea typeface="맑은 고딕"/>
+                        </a:rPr>
+                        <a:t>)</a:t>
                       </a:r>
                     </a:p>
                   </a:txBody>
@@ -6445,6 +7128,11 @@
                     </a:solidFill>
                   </a:tcPr>
                 </a:tc>
+                <a:extLst>
+                  <a:ext uri="{0D108BD9-81ED-4DB2-BD59-A6C34878D82A}">
+                    <a16:rowId xmlns:a16="http://schemas.microsoft.com/office/drawing/2014/main" val="10015"/>
+                  </a:ext>
+                </a:extLst>
               </a:tr>
             </a:tbl>
           </a:graphicData>
@@ -6483,7 +7171,15 @@
               <a:t>PQC 세미나 — 2026.07.09  |  학습 계획</a:t>
             </a:r>
           </a:p>
-          <a:p/>
+          <a:p>
+            <a:endParaRPr sz="1000" b="0">
+              <a:solidFill>
+                <a:srgbClr val="5A5A5A"/>
+              </a:solidFill>
+              <a:latin typeface="맑은 고딕"/>
+              <a:ea typeface="맑은 고딕"/>
+            </a:endParaRPr>
+          </a:p>
         </p:txBody>
       </p:sp>
       <p:sp>
@@ -6531,7 +7227,7 @@
 </file>
 
 <file path=ppt/slides/slide5.xml><?xml version="1.0" encoding="utf-8"?>
-<p:sld xmlns:a="http://schemas.openxmlformats.org/drawingml/2006/main" xmlns:p="http://schemas.openxmlformats.org/presentationml/2006/main" xmlns:r="http://schemas.openxmlformats.org/officeDocument/2006/relationships">
+<p:sld xmlns:a="http://schemas.openxmlformats.org/drawingml/2006/main" xmlns:r="http://schemas.openxmlformats.org/officeDocument/2006/relationships" xmlns:p="http://schemas.openxmlformats.org/presentationml/2006/main">
   <p:cSld>
     <p:spTree>
       <p:nvGrpSpPr>
@@ -6539,7 +7235,14 @@
         <p:cNvGrpSpPr/>
         <p:nvPr/>
       </p:nvGrpSpPr>
-      <p:grpSpPr/>
+      <p:grpSpPr>
+        <a:xfrm>
+          <a:off x="0" y="0"/>
+          <a:ext cx="0" cy="0"/>
+          <a:chOff x="0" y="0"/>
+          <a:chExt cx="0" cy="0"/>
+        </a:xfrm>
+      </p:grpSpPr>
       <p:sp>
         <p:nvSpPr>
           <p:cNvPr id="2" name="Rectangle 1"/>
@@ -6580,6 +7283,7 @@
           <a:lstStyle/>
           <a:p>
             <a:pPr algn="ctr"/>
+            <a:endParaRPr/>
           </a:p>
         </p:txBody>
       </p:sp>
@@ -6829,7 +7533,15 @@
               <a:t>PQC 세미나 — 2026.07.09  |  학습 계획</a:t>
             </a:r>
           </a:p>
-          <a:p/>
+          <a:p>
+            <a:endParaRPr sz="1000" b="0">
+              <a:solidFill>
+                <a:srgbClr val="5A5A5A"/>
+              </a:solidFill>
+              <a:latin typeface="맑은 고딕"/>
+              <a:ea typeface="맑은 고딕"/>
+            </a:endParaRPr>
+          </a:p>
         </p:txBody>
       </p:sp>
       <p:sp>
@@ -6877,7 +7589,7 @@
 </file>
 
 <file path=ppt/slides/slide6.xml><?xml version="1.0" encoding="utf-8"?>
-<p:sld xmlns:a="http://schemas.openxmlformats.org/drawingml/2006/main" xmlns:p="http://schemas.openxmlformats.org/presentationml/2006/main" xmlns:r="http://schemas.openxmlformats.org/officeDocument/2006/relationships">
+<p:sld xmlns:a="http://schemas.openxmlformats.org/drawingml/2006/main" xmlns:r="http://schemas.openxmlformats.org/officeDocument/2006/relationships" xmlns:p="http://schemas.openxmlformats.org/presentationml/2006/main">
   <p:cSld>
     <p:spTree>
       <p:nvGrpSpPr>
@@ -6885,7 +7597,14 @@
         <p:cNvGrpSpPr/>
         <p:nvPr/>
       </p:nvGrpSpPr>
-      <p:grpSpPr/>
+      <p:grpSpPr>
+        <a:xfrm>
+          <a:off x="0" y="0"/>
+          <a:ext cx="0" cy="0"/>
+          <a:chOff x="0" y="0"/>
+          <a:chExt cx="0" cy="0"/>
+        </a:xfrm>
+      </p:grpSpPr>
       <p:sp>
         <p:nvSpPr>
           <p:cNvPr id="2" name="Rectangle 1"/>
@@ -6926,6 +7645,7 @@
           <a:lstStyle/>
           <a:p>
             <a:pPr algn="ctr"/>
+            <a:endParaRPr/>
           </a:p>
         </p:txBody>
       </p:sp>
@@ -7175,7 +7895,15 @@
               <a:t>PQC 세미나 — 2026.07.09  |  1강 Introduction</a:t>
             </a:r>
           </a:p>
-          <a:p/>
+          <a:p>
+            <a:endParaRPr sz="1000" b="0">
+              <a:solidFill>
+                <a:srgbClr val="5A5A5A"/>
+              </a:solidFill>
+              <a:latin typeface="맑은 고딕"/>
+              <a:ea typeface="맑은 고딕"/>
+            </a:endParaRPr>
+          </a:p>
         </p:txBody>
       </p:sp>
       <p:sp>
@@ -7223,7 +7951,7 @@
 </file>
 
 <file path=ppt/slides/slide7.xml><?xml version="1.0" encoding="utf-8"?>
-<p:sld xmlns:a="http://schemas.openxmlformats.org/drawingml/2006/main" xmlns:p="http://schemas.openxmlformats.org/presentationml/2006/main" xmlns:r="http://schemas.openxmlformats.org/officeDocument/2006/relationships">
+<p:sld xmlns:a="http://schemas.openxmlformats.org/drawingml/2006/main" xmlns:r="http://schemas.openxmlformats.org/officeDocument/2006/relationships" xmlns:p="http://schemas.openxmlformats.org/presentationml/2006/main">
   <p:cSld>
     <p:spTree>
       <p:nvGrpSpPr>
@@ -7231,7 +7959,14 @@
         <p:cNvGrpSpPr/>
         <p:nvPr/>
       </p:nvGrpSpPr>
-      <p:grpSpPr/>
+      <p:grpSpPr>
+        <a:xfrm>
+          <a:off x="0" y="0"/>
+          <a:ext cx="0" cy="0"/>
+          <a:chOff x="0" y="0"/>
+          <a:chExt cx="0" cy="0"/>
+        </a:xfrm>
+      </p:grpSpPr>
       <p:sp>
         <p:nvSpPr>
           <p:cNvPr id="2" name="Rectangle 1"/>
@@ -7272,6 +8007,7 @@
           <a:lstStyle/>
           <a:p>
             <a:pPr algn="ctr"/>
+            <a:endParaRPr/>
           </a:p>
         </p:txBody>
       </p:sp>
@@ -7521,7 +8257,15 @@
               <a:t>PQC 세미나 — 2026.07.09  |  1강 Introduction</a:t>
             </a:r>
           </a:p>
-          <a:p/>
+          <a:p>
+            <a:endParaRPr sz="1000" b="0">
+              <a:solidFill>
+                <a:srgbClr val="5A5A5A"/>
+              </a:solidFill>
+              <a:latin typeface="맑은 고딕"/>
+              <a:ea typeface="맑은 고딕"/>
+            </a:endParaRPr>
+          </a:p>
         </p:txBody>
       </p:sp>
       <p:sp>
@@ -7569,7 +8313,7 @@
 </file>
 
 <file path=ppt/slides/slide8.xml><?xml version="1.0" encoding="utf-8"?>
-<p:sld xmlns:a="http://schemas.openxmlformats.org/drawingml/2006/main" xmlns:p="http://schemas.openxmlformats.org/presentationml/2006/main" xmlns:r="http://schemas.openxmlformats.org/officeDocument/2006/relationships">
+<p:sld xmlns:a="http://schemas.openxmlformats.org/drawingml/2006/main" xmlns:r="http://schemas.openxmlformats.org/officeDocument/2006/relationships" xmlns:p="http://schemas.openxmlformats.org/presentationml/2006/main">
   <p:cSld>
     <p:spTree>
       <p:nvGrpSpPr>
@@ -7577,7 +8321,14 @@
         <p:cNvGrpSpPr/>
         <p:nvPr/>
       </p:nvGrpSpPr>
-      <p:grpSpPr/>
+      <p:grpSpPr>
+        <a:xfrm>
+          <a:off x="0" y="0"/>
+          <a:ext cx="0" cy="0"/>
+          <a:chOff x="0" y="0"/>
+          <a:chExt cx="0" cy="0"/>
+        </a:xfrm>
+      </p:grpSpPr>
       <p:sp>
         <p:nvSpPr>
           <p:cNvPr id="2" name="Rectangle 1"/>
@@ -7618,6 +8369,7 @@
           <a:lstStyle/>
           <a:p>
             <a:pPr algn="ctr"/>
+            <a:endParaRPr/>
           </a:p>
         </p:txBody>
       </p:sp>
@@ -7807,7 +8559,15 @@
               <a:t>PQC 세미나 — 2026.07.09  |  1강 Introduction</a:t>
             </a:r>
           </a:p>
-          <a:p/>
+          <a:p>
+            <a:endParaRPr sz="1000" b="0">
+              <a:solidFill>
+                <a:srgbClr val="5A5A5A"/>
+              </a:solidFill>
+              <a:latin typeface="맑은 고딕"/>
+              <a:ea typeface="맑은 고딕"/>
+            </a:endParaRPr>
+          </a:p>
         </p:txBody>
       </p:sp>
       <p:sp>
@@ -7855,7 +8615,7 @@
 </file>
 
 <file path=ppt/slides/slide9.xml><?xml version="1.0" encoding="utf-8"?>
-<p:sld xmlns:a="http://schemas.openxmlformats.org/drawingml/2006/main" xmlns:p="http://schemas.openxmlformats.org/presentationml/2006/main" xmlns:r="http://schemas.openxmlformats.org/officeDocument/2006/relationships">
+<p:sld xmlns:a="http://schemas.openxmlformats.org/drawingml/2006/main" xmlns:r="http://schemas.openxmlformats.org/officeDocument/2006/relationships" xmlns:p="http://schemas.openxmlformats.org/presentationml/2006/main">
   <p:cSld>
     <p:spTree>
       <p:nvGrpSpPr>
@@ -7863,7 +8623,14 @@
         <p:cNvGrpSpPr/>
         <p:nvPr/>
       </p:nvGrpSpPr>
-      <p:grpSpPr/>
+      <p:grpSpPr>
+        <a:xfrm>
+          <a:off x="0" y="0"/>
+          <a:ext cx="0" cy="0"/>
+          <a:chOff x="0" y="0"/>
+          <a:chExt cx="0" cy="0"/>
+        </a:xfrm>
+      </p:grpSpPr>
       <p:sp>
         <p:nvSpPr>
           <p:cNvPr id="2" name="Rectangle 1"/>
@@ -7904,6 +8671,7 @@
           <a:lstStyle/>
           <a:p>
             <a:pPr algn="ctr"/>
+            <a:endParaRPr/>
           </a:p>
         </p:txBody>
       </p:sp>
@@ -8016,7 +8784,7 @@
           </a:fontRef>
         </p:style>
         <p:txBody>
-          <a:bodyPr rtlCol="0" anchor="ctr" wrap="square"/>
+          <a:bodyPr wrap="square" rtlCol="0" anchor="ctr"/>
           <a:lstStyle/>
           <a:p>
             <a:pPr algn="ctr"/>
@@ -8108,7 +8876,7 @@
           </a:fontRef>
         </p:style>
         <p:txBody>
-          <a:bodyPr rtlCol="0" anchor="ctr" wrap="square"/>
+          <a:bodyPr wrap="square" rtlCol="0" anchor="ctr"/>
           <a:lstStyle/>
           <a:p>
             <a:pPr algn="ctr"/>
@@ -8200,7 +8968,7 @@
           </a:fontRef>
         </p:style>
         <p:txBody>
-          <a:bodyPr rtlCol="0" anchor="ctr" wrap="square"/>
+          <a:bodyPr wrap="square" rtlCol="0" anchor="ctr"/>
           <a:lstStyle/>
           <a:p>
             <a:pPr algn="ctr"/>
@@ -8292,7 +9060,7 @@
           </a:fontRef>
         </p:style>
         <p:txBody>
-          <a:bodyPr rtlCol="0" anchor="ctr" wrap="square"/>
+          <a:bodyPr wrap="square" rtlCol="0" anchor="ctr"/>
           <a:lstStyle/>
           <a:p>
             <a:pPr algn="ctr"/>
@@ -8384,7 +9152,7 @@
           </a:fontRef>
         </p:style>
         <p:txBody>
-          <a:bodyPr rtlCol="0" anchor="ctr" wrap="square"/>
+          <a:bodyPr wrap="square" rtlCol="0" anchor="ctr"/>
           <a:lstStyle/>
           <a:p>
             <a:pPr algn="ctr"/>
@@ -8476,7 +9244,7 @@
           </a:fontRef>
         </p:style>
         <p:txBody>
-          <a:bodyPr rtlCol="0" anchor="ctr" wrap="square"/>
+          <a:bodyPr wrap="square" rtlCol="0" anchor="ctr"/>
           <a:lstStyle/>
           <a:p>
             <a:pPr algn="ctr"/>
@@ -8589,7 +9357,15 @@
               <a:t>PQC 세미나 — 2026.07.09  |  1강 Introduction</a:t>
             </a:r>
           </a:p>
-          <a:p/>
+          <a:p>
+            <a:endParaRPr sz="1000" b="0">
+              <a:solidFill>
+                <a:srgbClr val="5A5A5A"/>
+              </a:solidFill>
+              <a:latin typeface="맑은 고딕"/>
+              <a:ea typeface="맑은 고딕"/>
+            </a:endParaRPr>
+          </a:p>
         </p:txBody>
       </p:sp>
       <p:sp>
